--- a/day2/slides/review.pptx
+++ b/day2/slides/review.pptx
@@ -5,7 +5,7 @@
     <p:sldMasterId id="2147484294" r:id="rId1"/>
   </p:sldMasterIdLst>
   <p:notesMasterIdLst>
-    <p:notesMasterId r:id="rId33"/>
+    <p:notesMasterId r:id="rId38"/>
   </p:notesMasterIdLst>
   <p:sldIdLst>
     <p:sldId id="256" r:id="rId2"/>
@@ -39,6 +39,11 @@
     <p:sldId id="286" r:id="rId30"/>
     <p:sldId id="287" r:id="rId31"/>
     <p:sldId id="279" r:id="rId32"/>
+    <p:sldId id="288" r:id="rId33"/>
+    <p:sldId id="289" r:id="rId34"/>
+    <p:sldId id="291" r:id="rId35"/>
+    <p:sldId id="290" r:id="rId36"/>
+    <p:sldId id="292" r:id="rId37"/>
   </p:sldIdLst>
   <p:sldSz cx="12192000" cy="6858000"/>
   <p:notesSz cx="6858000" cy="9144000"/>
@@ -227,7 +232,7 @@
           <a:p>
             <a:fld id="{3E00069D-D4B1-DA43-B156-1FB9179E1249}" type="datetimeFigureOut">
               <a:rPr lang="en-US" smtClean="0"/>
-              <a:t>5/17/23</a:t>
+              <a:t>5/10/26</a:t>
             </a:fld>
             <a:endParaRPr lang="en-US"/>
           </a:p>
@@ -1814,11 +1819,7 @@
             </a:r>
             <a:r>
               <a:rPr lang="en-US" baseline="0" dirty="0"/>
-              <a:t> noting here that filter and map were almost removed from Python 3 in favor of list comprehensions, but they’re still </a:t>
-            </a:r>
-            <a:r>
-              <a:rPr lang="en-US" baseline="0"/>
-              <a:t>part of Python. </a:t>
+              <a:t> noting here that filter and map were almost removed from Python 3 in favor of list comprehensions, but they’re still part of Python. </a:t>
             </a:r>
             <a:endParaRPr lang="en-US" dirty="0"/>
           </a:p>
@@ -1851,6 +1852,174 @@
     <p:extLst>
       <p:ext uri="{BB962C8B-B14F-4D97-AF65-F5344CB8AC3E}">
         <p14:creationId xmlns:p14="http://schemas.microsoft.com/office/powerpoint/2010/main" val="925057836"/>
+      </p:ext>
+    </p:extLst>
+  </p:cSld>
+  <p:clrMapOvr>
+    <a:masterClrMapping/>
+  </p:clrMapOvr>
+</p:notes>
+</file>
+
+<file path=ppt/notesSlides/notesSlide21.xml><?xml version="1.0" encoding="utf-8"?>
+<p:notes xmlns:a="http://schemas.openxmlformats.org/drawingml/2006/main" xmlns:r="http://schemas.openxmlformats.org/officeDocument/2006/relationships" xmlns:p="http://schemas.openxmlformats.org/presentationml/2006/main">
+  <p:cSld>
+    <p:spTree>
+      <p:nvGrpSpPr>
+        <p:cNvPr id="1" name=""/>
+        <p:cNvGrpSpPr/>
+        <p:nvPr/>
+      </p:nvGrpSpPr>
+      <p:grpSpPr>
+        <a:xfrm>
+          <a:off x="0" y="0"/>
+          <a:ext cx="0" cy="0"/>
+          <a:chOff x="0" y="0"/>
+          <a:chExt cx="0" cy="0"/>
+        </a:xfrm>
+      </p:grpSpPr>
+      <p:sp>
+        <p:nvSpPr>
+          <p:cNvPr id="2" name="Slide Image Placeholder 1"/>
+          <p:cNvSpPr>
+            <a:spLocks noGrp="1" noRot="1" noChangeAspect="1"/>
+          </p:cNvSpPr>
+          <p:nvPr>
+            <p:ph type="sldImg"/>
+          </p:nvPr>
+        </p:nvSpPr>
+        <p:spPr/>
+      </p:sp>
+      <p:sp>
+        <p:nvSpPr>
+          <p:cNvPr id="3" name="Notes Placeholder 2"/>
+          <p:cNvSpPr>
+            <a:spLocks noGrp="1"/>
+          </p:cNvSpPr>
+          <p:nvPr>
+            <p:ph type="body" idx="1"/>
+          </p:nvPr>
+        </p:nvSpPr>
+        <p:spPr/>
+        <p:txBody>
+          <a:bodyPr/>
+          <a:lstStyle/>
+          <a:p>
+            <a:endParaRPr lang="en-US" dirty="0"/>
+          </a:p>
+        </p:txBody>
+      </p:sp>
+      <p:sp>
+        <p:nvSpPr>
+          <p:cNvPr id="4" name="Slide Number Placeholder 3"/>
+          <p:cNvSpPr>
+            <a:spLocks noGrp="1"/>
+          </p:cNvSpPr>
+          <p:nvPr>
+            <p:ph type="sldNum" sz="quarter" idx="5"/>
+          </p:nvPr>
+        </p:nvSpPr>
+        <p:spPr/>
+        <p:txBody>
+          <a:bodyPr/>
+          <a:lstStyle/>
+          <a:p>
+            <a:fld id="{A10D7ED9-0168-6F49-A704-0689E647D42E}" type="slidenum">
+              <a:rPr lang="en-US" smtClean="0"/>
+              <a:t>35</a:t>
+            </a:fld>
+            <a:endParaRPr lang="en-US"/>
+          </a:p>
+        </p:txBody>
+      </p:sp>
+    </p:spTree>
+    <p:extLst>
+      <p:ext uri="{BB962C8B-B14F-4D97-AF65-F5344CB8AC3E}">
+        <p14:creationId xmlns:p14="http://schemas.microsoft.com/office/powerpoint/2010/main" val="137881040"/>
+      </p:ext>
+    </p:extLst>
+  </p:cSld>
+  <p:clrMapOvr>
+    <a:masterClrMapping/>
+  </p:clrMapOvr>
+</p:notes>
+</file>
+
+<file path=ppt/notesSlides/notesSlide22.xml><?xml version="1.0" encoding="utf-8"?>
+<p:notes xmlns:a="http://schemas.openxmlformats.org/drawingml/2006/main" xmlns:r="http://schemas.openxmlformats.org/officeDocument/2006/relationships" xmlns:p="http://schemas.openxmlformats.org/presentationml/2006/main">
+  <p:cSld>
+    <p:spTree>
+      <p:nvGrpSpPr>
+        <p:cNvPr id="1" name=""/>
+        <p:cNvGrpSpPr/>
+        <p:nvPr/>
+      </p:nvGrpSpPr>
+      <p:grpSpPr>
+        <a:xfrm>
+          <a:off x="0" y="0"/>
+          <a:ext cx="0" cy="0"/>
+          <a:chOff x="0" y="0"/>
+          <a:chExt cx="0" cy="0"/>
+        </a:xfrm>
+      </p:grpSpPr>
+      <p:sp>
+        <p:nvSpPr>
+          <p:cNvPr id="2" name="Slide Image Placeholder 1"/>
+          <p:cNvSpPr>
+            <a:spLocks noGrp="1" noRot="1" noChangeAspect="1"/>
+          </p:cNvSpPr>
+          <p:nvPr>
+            <p:ph type="sldImg"/>
+          </p:nvPr>
+        </p:nvSpPr>
+        <p:spPr/>
+      </p:sp>
+      <p:sp>
+        <p:nvSpPr>
+          <p:cNvPr id="3" name="Notes Placeholder 2"/>
+          <p:cNvSpPr>
+            <a:spLocks noGrp="1"/>
+          </p:cNvSpPr>
+          <p:nvPr>
+            <p:ph type="body" idx="1"/>
+          </p:nvPr>
+        </p:nvSpPr>
+        <p:spPr/>
+        <p:txBody>
+          <a:bodyPr/>
+          <a:lstStyle/>
+          <a:p>
+            <a:endParaRPr lang="en-US" dirty="0"/>
+          </a:p>
+        </p:txBody>
+      </p:sp>
+      <p:sp>
+        <p:nvSpPr>
+          <p:cNvPr id="4" name="Slide Number Placeholder 3"/>
+          <p:cNvSpPr>
+            <a:spLocks noGrp="1"/>
+          </p:cNvSpPr>
+          <p:nvPr>
+            <p:ph type="sldNum" sz="quarter" idx="5"/>
+          </p:nvPr>
+        </p:nvSpPr>
+        <p:spPr/>
+        <p:txBody>
+          <a:bodyPr/>
+          <a:lstStyle/>
+          <a:p>
+            <a:fld id="{A10D7ED9-0168-6F49-A704-0689E647D42E}" type="slidenum">
+              <a:rPr lang="en-US" smtClean="0"/>
+              <a:t>36</a:t>
+            </a:fld>
+            <a:endParaRPr lang="en-US"/>
+          </a:p>
+        </p:txBody>
+      </p:sp>
+    </p:spTree>
+    <p:extLst>
+      <p:ext uri="{BB962C8B-B14F-4D97-AF65-F5344CB8AC3E}">
+        <p14:creationId xmlns:p14="http://schemas.microsoft.com/office/powerpoint/2010/main" val="1735329834"/>
       </p:ext>
     </p:extLst>
   </p:cSld>
@@ -2766,6 +2935,13 @@
             <a:schemeClr val="lt1"/>
           </a:fontRef>
         </p:style>
+        <p:txBody>
+          <a:bodyPr/>
+          <a:lstStyle/>
+          <a:p>
+            <a:endParaRPr lang="en-US"/>
+          </a:p>
+        </p:txBody>
       </p:sp>
       <p:sp>
         <p:nvSpPr>
@@ -2804,6 +2980,13 @@
             <a:schemeClr val="lt1"/>
           </a:fontRef>
         </p:style>
+        <p:txBody>
+          <a:bodyPr/>
+          <a:lstStyle/>
+          <a:p>
+            <a:endParaRPr lang="en-US"/>
+          </a:p>
+        </p:txBody>
       </p:sp>
       <p:sp>
         <p:nvSpPr>
@@ -2925,7 +3108,7 @@
           <a:p>
             <a:fld id="{51673806-0BCD-1F42-BAA8-2011034B3C6A}" type="datetimeFigureOut">
               <a:rPr lang="en-US" smtClean="0"/>
-              <a:t>5/17/23</a:t>
+              <a:t>5/10/26</a:t>
             </a:fld>
             <a:endParaRPr lang="en-US" dirty="0"/>
           </a:p>
@@ -3338,7 +3521,7 @@
           <a:p>
             <a:fld id="{51673806-0BCD-1F42-BAA8-2011034B3C6A}" type="datetimeFigureOut">
               <a:rPr lang="en-US" smtClean="0"/>
-              <a:t>5/17/23</a:t>
+              <a:t>5/10/26</a:t>
             </a:fld>
             <a:endParaRPr lang="en-US" dirty="0"/>
           </a:p>
@@ -3669,7 +3852,7 @@
           <a:p>
             <a:fld id="{51673806-0BCD-1F42-BAA8-2011034B3C6A}" type="datetimeFigureOut">
               <a:rPr lang="en-US" smtClean="0"/>
-              <a:t>5/17/23</a:t>
+              <a:t>5/10/26</a:t>
             </a:fld>
             <a:endParaRPr lang="en-US" dirty="0"/>
           </a:p>
@@ -4069,7 +4252,7 @@
           <a:p>
             <a:fld id="{51673806-0BCD-1F42-BAA8-2011034B3C6A}" type="datetimeFigureOut">
               <a:rPr lang="en-US" smtClean="0"/>
-              <a:t>5/17/23</a:t>
+              <a:t>5/10/26</a:t>
             </a:fld>
             <a:endParaRPr lang="en-US" dirty="0"/>
           </a:p>
@@ -4632,7 +4815,7 @@
           <a:p>
             <a:fld id="{51673806-0BCD-1F42-BAA8-2011034B3C6A}" type="datetimeFigureOut">
               <a:rPr lang="en-US" smtClean="0"/>
-              <a:t>5/17/23</a:t>
+              <a:t>5/10/26</a:t>
             </a:fld>
             <a:endParaRPr lang="en-US" dirty="0"/>
           </a:p>
@@ -5308,7 +5491,7 @@
           <a:p>
             <a:fld id="{51673806-0BCD-1F42-BAA8-2011034B3C6A}" type="datetimeFigureOut">
               <a:rPr lang="en-US" smtClean="0"/>
-              <a:t>5/17/23</a:t>
+              <a:t>5/10/26</a:t>
             </a:fld>
             <a:endParaRPr lang="en-US" dirty="0"/>
           </a:p>
@@ -6213,7 +6396,7 @@
           <a:p>
             <a:fld id="{51673806-0BCD-1F42-BAA8-2011034B3C6A}" type="datetimeFigureOut">
               <a:rPr lang="en-US" smtClean="0"/>
-              <a:t>5/17/23</a:t>
+              <a:t>5/10/26</a:t>
             </a:fld>
             <a:endParaRPr lang="en-US" dirty="0"/>
           </a:p>
@@ -6521,7 +6704,7 @@
           <a:p>
             <a:fld id="{51673806-0BCD-1F42-BAA8-2011034B3C6A}" type="datetimeFigureOut">
               <a:rPr lang="en-US" smtClean="0"/>
-              <a:t>5/17/23</a:t>
+              <a:t>5/10/26</a:t>
             </a:fld>
             <a:endParaRPr lang="en-US" dirty="0"/>
           </a:p>
@@ -6780,7 +6963,7 @@
           <a:p>
             <a:fld id="{51673806-0BCD-1F42-BAA8-2011034B3C6A}" type="datetimeFigureOut">
               <a:rPr lang="en-US" smtClean="0"/>
-              <a:t>5/17/23</a:t>
+              <a:t>5/10/26</a:t>
             </a:fld>
             <a:endParaRPr lang="en-US" dirty="0"/>
           </a:p>
@@ -7103,7 +7286,7 @@
           <a:p>
             <a:fld id="{51673806-0BCD-1F42-BAA8-2011034B3C6A}" type="datetimeFigureOut">
               <a:rPr lang="en-US" smtClean="0"/>
-              <a:t>5/17/23</a:t>
+              <a:t>5/10/26</a:t>
             </a:fld>
             <a:endParaRPr lang="en-US" dirty="0"/>
           </a:p>
@@ -7487,7 +7670,7 @@
           <a:p>
             <a:fld id="{51673806-0BCD-1F42-BAA8-2011034B3C6A}" type="datetimeFigureOut">
               <a:rPr lang="en-US" smtClean="0"/>
-              <a:t>5/17/23</a:t>
+              <a:t>5/10/26</a:t>
             </a:fld>
             <a:endParaRPr lang="en-US" dirty="0"/>
           </a:p>
@@ -7863,7 +8046,7 @@
           <a:p>
             <a:fld id="{51673806-0BCD-1F42-BAA8-2011034B3C6A}" type="datetimeFigureOut">
               <a:rPr lang="en-US" smtClean="0"/>
-              <a:t>5/17/23</a:t>
+              <a:t>5/10/26</a:t>
             </a:fld>
             <a:endParaRPr lang="en-US" dirty="0"/>
           </a:p>
@@ -8369,7 +8552,7 @@
           <a:p>
             <a:fld id="{51673806-0BCD-1F42-BAA8-2011034B3C6A}" type="datetimeFigureOut">
               <a:rPr lang="en-US" smtClean="0"/>
-              <a:t>5/17/23</a:t>
+              <a:t>5/10/26</a:t>
             </a:fld>
             <a:endParaRPr lang="en-US" dirty="0"/>
           </a:p>
@@ -8626,7 +8809,7 @@
           <a:p>
             <a:fld id="{51673806-0BCD-1F42-BAA8-2011034B3C6A}" type="datetimeFigureOut">
               <a:rPr lang="en-US" smtClean="0"/>
-              <a:t>5/17/23</a:t>
+              <a:t>5/10/26</a:t>
             </a:fld>
             <a:endParaRPr lang="en-US" dirty="0"/>
           </a:p>
@@ -8784,7 +8967,7 @@
           <a:p>
             <a:fld id="{51673806-0BCD-1F42-BAA8-2011034B3C6A}" type="datetimeFigureOut">
               <a:rPr lang="en-US" smtClean="0"/>
-              <a:t>5/17/23</a:t>
+              <a:t>5/10/26</a:t>
             </a:fld>
             <a:endParaRPr lang="en-US" dirty="0"/>
           </a:p>
@@ -9174,7 +9357,7 @@
           <a:p>
             <a:fld id="{51673806-0BCD-1F42-BAA8-2011034B3C6A}" type="datetimeFigureOut">
               <a:rPr lang="en-US" smtClean="0"/>
-              <a:t>5/17/23</a:t>
+              <a:t>5/10/26</a:t>
             </a:fld>
             <a:endParaRPr lang="en-US" dirty="0"/>
           </a:p>
@@ -9582,7 +9765,7 @@
           <a:p>
             <a:fld id="{51673806-0BCD-1F42-BAA8-2011034B3C6A}" type="datetimeFigureOut">
               <a:rPr lang="en-US" smtClean="0"/>
-              <a:t>5/17/23</a:t>
+              <a:t>5/10/26</a:t>
             </a:fld>
             <a:endParaRPr lang="en-US" dirty="0"/>
           </a:p>
@@ -9827,7 +10010,7 @@
             <a:fld id="{51673806-0BCD-1F42-BAA8-2011034B3C6A}" type="datetimeFigureOut">
               <a:rPr lang="en-US" smtClean="0"/>
               <a:pPr/>
-              <a:t>5/17/23</a:t>
+              <a:t>5/10/26</a:t>
             </a:fld>
             <a:endParaRPr lang="en-US" dirty="0"/>
           </a:p>
@@ -11105,15 +11288,15 @@
               <a:buNone/>
             </a:pPr>
             <a:r>
-              <a:rPr lang="en-US" sz="4800" dirty="0"/>
+              <a:rPr lang="en-US" sz="3600" dirty="0"/>
               <a:t>LISTS AND ARRAYS ARE </a:t>
             </a:r>
             <a:r>
-              <a:rPr lang="en-US" sz="4800" b="1" i="1" u="sng" dirty="0"/>
+              <a:rPr lang="en-US" sz="3600" b="1" i="1" u="sng" dirty="0"/>
               <a:t>NOT</a:t>
             </a:r>
             <a:r>
-              <a:rPr lang="en-US" sz="4800" dirty="0"/>
+              <a:rPr lang="en-US" sz="3600" dirty="0"/>
               <a:t> THE SAME THING</a:t>
             </a:r>
           </a:p>
@@ -13970,7 +14153,7 @@
             </a:pPr>
             <a:r>
               <a:rPr lang="en-US" dirty="0"/>
-              <a:t>Example: freeing up memory</a:t>
+              <a:t>Example: closing files</a:t>
             </a:r>
           </a:p>
           <a:p>
@@ -13992,45 +14175,6 @@
               <a:defRPr/>
             </a:pPr>
             <a:endParaRPr lang="en-US" dirty="0"/>
-          </a:p>
-          <a:p>
-            <a:pPr marL="0" marR="0" lvl="0" indent="0" defTabSz="914400" eaLnBrk="1" fontAlgn="auto" latinLnBrk="0" hangingPunct="1">
-              <a:lnSpc>
-                <a:spcPct val="100000"/>
-              </a:lnSpc>
-              <a:spcBef>
-                <a:spcPts val="0"/>
-              </a:spcBef>
-              <a:spcAft>
-                <a:spcPts val="0"/>
-              </a:spcAft>
-              <a:buClrTx/>
-              <a:buSzTx/>
-              <a:buFontTx/>
-              <a:buNone/>
-              <a:tabLst/>
-              <a:defRPr/>
-            </a:pPr>
-            <a:r>
-              <a:rPr lang="en-US" dirty="0"/>
-              <a:t>Disclaimer </a:t>
-            </a:r>
-            <a:r>
-              <a:rPr lang="mr-IN" dirty="0"/>
-              <a:t>–</a:t>
-            </a:r>
-            <a:r>
-              <a:rPr lang="en-US" dirty="0"/>
-              <a:t> return statements in a </a:t>
-            </a:r>
-            <a:r>
-              <a:rPr lang="en-US" i="1" dirty="0"/>
-              <a:t>finally</a:t>
-            </a:r>
-            <a:r>
-              <a:rPr lang="en-US" dirty="0"/>
-              <a:t> block will always override previous return statements in the try-except block </a:t>
-            </a:r>
           </a:p>
         </p:txBody>
       </p:sp>
@@ -15386,6 +15530,642 @@
 </p:sld>
 </file>
 
+<file path=ppt/slides/slide32.xml><?xml version="1.0" encoding="utf-8"?>
+<p:sld xmlns:a="http://schemas.openxmlformats.org/drawingml/2006/main" xmlns:r="http://schemas.openxmlformats.org/officeDocument/2006/relationships" xmlns:p="http://schemas.openxmlformats.org/presentationml/2006/main">
+  <p:cSld>
+    <p:spTree>
+      <p:nvGrpSpPr>
+        <p:cNvPr id="1" name=""/>
+        <p:cNvGrpSpPr/>
+        <p:nvPr/>
+      </p:nvGrpSpPr>
+      <p:grpSpPr>
+        <a:xfrm>
+          <a:off x="0" y="0"/>
+          <a:ext cx="0" cy="0"/>
+          <a:chOff x="0" y="0"/>
+          <a:chExt cx="0" cy="0"/>
+        </a:xfrm>
+      </p:grpSpPr>
+      <p:sp>
+        <p:nvSpPr>
+          <p:cNvPr id="2" name="Title 1">
+            <a:extLst>
+              <a:ext uri="{FF2B5EF4-FFF2-40B4-BE49-F238E27FC236}">
+                <a16:creationId xmlns:a16="http://schemas.microsoft.com/office/drawing/2014/main" id="{42946A97-EB7A-A620-DCC7-E0E3A0C022EB}"/>
+              </a:ext>
+            </a:extLst>
+          </p:cNvPr>
+          <p:cNvSpPr>
+            <a:spLocks noGrp="1"/>
+          </p:cNvSpPr>
+          <p:nvPr>
+            <p:ph type="title"/>
+          </p:nvPr>
+        </p:nvSpPr>
+        <p:spPr/>
+        <p:txBody>
+          <a:bodyPr/>
+          <a:lstStyle/>
+          <a:p>
+            <a:r>
+              <a:rPr lang="en-US" dirty="0"/>
+              <a:t>List Comprehension</a:t>
+            </a:r>
+          </a:p>
+        </p:txBody>
+      </p:sp>
+      <p:sp>
+        <p:nvSpPr>
+          <p:cNvPr id="3" name="Content Placeholder 2">
+            <a:extLst>
+              <a:ext uri="{FF2B5EF4-FFF2-40B4-BE49-F238E27FC236}">
+                <a16:creationId xmlns:a16="http://schemas.microsoft.com/office/drawing/2014/main" id="{A1E1E626-D204-37B7-6BE4-21F8C70393A8}"/>
+              </a:ext>
+            </a:extLst>
+          </p:cNvPr>
+          <p:cNvSpPr>
+            <a:spLocks noGrp="1"/>
+          </p:cNvSpPr>
+          <p:nvPr>
+            <p:ph idx="1"/>
+          </p:nvPr>
+        </p:nvSpPr>
+        <p:spPr/>
+        <p:txBody>
+          <a:bodyPr/>
+          <a:lstStyle/>
+          <a:p>
+            <a:pPr marL="0" indent="0">
+              <a:buNone/>
+            </a:pPr>
+            <a:r>
+              <a:rPr lang="en-US" dirty="0"/>
+              <a:t>Let’s you create new lists from old lists in a more concise syntax. Very convenient for ‘trimming’ data in large datasets.</a:t>
+            </a:r>
+          </a:p>
+          <a:p>
+            <a:pPr marL="0" indent="0">
+              <a:buNone/>
+            </a:pPr>
+            <a:endParaRPr lang="en-US" dirty="0"/>
+          </a:p>
+          <a:p>
+            <a:pPr marL="0" indent="0">
+              <a:buNone/>
+            </a:pPr>
+            <a:r>
+              <a:rPr lang="en-US" dirty="0" err="1"/>
+              <a:t>newlist</a:t>
+            </a:r>
+            <a:r>
+              <a:rPr lang="en-US" dirty="0"/>
+              <a:t> = [</a:t>
+            </a:r>
+            <a:r>
+              <a:rPr lang="en-US" i="1" dirty="0"/>
+              <a:t>expression</a:t>
+            </a:r>
+            <a:r>
+              <a:rPr lang="en-US" dirty="0"/>
+              <a:t> for </a:t>
+            </a:r>
+            <a:r>
+              <a:rPr lang="en-US" i="1" dirty="0"/>
+              <a:t>item</a:t>
+            </a:r>
+            <a:r>
+              <a:rPr lang="en-US" dirty="0"/>
+              <a:t> in </a:t>
+            </a:r>
+            <a:r>
+              <a:rPr lang="en-US" i="1" dirty="0" err="1"/>
+              <a:t>iterable</a:t>
+            </a:r>
+            <a:r>
+              <a:rPr lang="en-US" dirty="0"/>
+              <a:t> if </a:t>
+            </a:r>
+            <a:r>
+              <a:rPr lang="en-US" i="1" dirty="0"/>
+              <a:t>condition</a:t>
+            </a:r>
+            <a:r>
+              <a:rPr lang="en-US" dirty="0"/>
+              <a:t> == True]</a:t>
+            </a:r>
+          </a:p>
+        </p:txBody>
+      </p:sp>
+      <p:pic>
+        <p:nvPicPr>
+          <p:cNvPr id="4" name="Picture 3">
+            <a:extLst>
+              <a:ext uri="{FF2B5EF4-FFF2-40B4-BE49-F238E27FC236}">
+                <a16:creationId xmlns:a16="http://schemas.microsoft.com/office/drawing/2014/main" id="{4B452B28-08A0-D526-064C-055A0575141A}"/>
+              </a:ext>
+            </a:extLst>
+          </p:cNvPr>
+          <p:cNvPicPr>
+            <a:picLocks noChangeAspect="1"/>
+          </p:cNvPicPr>
+          <p:nvPr/>
+        </p:nvPicPr>
+        <p:blipFill>
+          <a:blip r:embed="rId2"/>
+          <a:stretch>
+            <a:fillRect/>
+          </a:stretch>
+        </p:blipFill>
+        <p:spPr>
+          <a:xfrm>
+            <a:off x="1629363" y="4247257"/>
+            <a:ext cx="8383465" cy="2519885"/>
+          </a:xfrm>
+          <a:prstGeom prst="rect">
+            <a:avLst/>
+          </a:prstGeom>
+        </p:spPr>
+      </p:pic>
+    </p:spTree>
+    <p:extLst>
+      <p:ext uri="{BB962C8B-B14F-4D97-AF65-F5344CB8AC3E}">
+        <p14:creationId xmlns:p14="http://schemas.microsoft.com/office/powerpoint/2010/main" val="340471706"/>
+      </p:ext>
+    </p:extLst>
+  </p:cSld>
+  <p:clrMapOvr>
+    <a:masterClrMapping/>
+  </p:clrMapOvr>
+</p:sld>
+</file>
+
+<file path=ppt/slides/slide33.xml><?xml version="1.0" encoding="utf-8"?>
+<p:sld xmlns:a="http://schemas.openxmlformats.org/drawingml/2006/main" xmlns:r="http://schemas.openxmlformats.org/officeDocument/2006/relationships" xmlns:p="http://schemas.openxmlformats.org/presentationml/2006/main">
+  <p:cSld>
+    <p:spTree>
+      <p:nvGrpSpPr>
+        <p:cNvPr id="1" name=""/>
+        <p:cNvGrpSpPr/>
+        <p:nvPr/>
+      </p:nvGrpSpPr>
+      <p:grpSpPr>
+        <a:xfrm>
+          <a:off x="0" y="0"/>
+          <a:ext cx="0" cy="0"/>
+          <a:chOff x="0" y="0"/>
+          <a:chExt cx="0" cy="0"/>
+        </a:xfrm>
+      </p:grpSpPr>
+      <p:sp>
+        <p:nvSpPr>
+          <p:cNvPr id="2" name="Title 1">
+            <a:extLst>
+              <a:ext uri="{FF2B5EF4-FFF2-40B4-BE49-F238E27FC236}">
+                <a16:creationId xmlns:a16="http://schemas.microsoft.com/office/drawing/2014/main" id="{286549F3-CF77-A129-6D9A-3E7BEE69495A}"/>
+              </a:ext>
+            </a:extLst>
+          </p:cNvPr>
+          <p:cNvSpPr>
+            <a:spLocks noGrp="1"/>
+          </p:cNvSpPr>
+          <p:nvPr>
+            <p:ph type="title"/>
+          </p:nvPr>
+        </p:nvSpPr>
+        <p:spPr/>
+        <p:txBody>
+          <a:bodyPr/>
+          <a:lstStyle/>
+          <a:p>
+            <a:r>
+              <a:rPr lang="en-US" dirty="0"/>
+              <a:t>Optimization</a:t>
+            </a:r>
+          </a:p>
+        </p:txBody>
+      </p:sp>
+      <p:sp>
+        <p:nvSpPr>
+          <p:cNvPr id="3" name="Content Placeholder 2">
+            <a:extLst>
+              <a:ext uri="{FF2B5EF4-FFF2-40B4-BE49-F238E27FC236}">
+                <a16:creationId xmlns:a16="http://schemas.microsoft.com/office/drawing/2014/main" id="{A44F3247-D350-27B4-738A-DA23DF8A1712}"/>
+              </a:ext>
+            </a:extLst>
+          </p:cNvPr>
+          <p:cNvSpPr>
+            <a:spLocks noGrp="1"/>
+          </p:cNvSpPr>
+          <p:nvPr>
+            <p:ph idx="1"/>
+          </p:nvPr>
+        </p:nvSpPr>
+        <p:spPr/>
+        <p:txBody>
+          <a:bodyPr/>
+          <a:lstStyle/>
+          <a:p>
+            <a:pPr marL="0" indent="0">
+              <a:buNone/>
+            </a:pPr>
+            <a:r>
+              <a:rPr lang="en-US" dirty="0"/>
+              <a:t>Python is a high level programming language, so you need to use the features built into the language and its packages if you want your code to be fast.</a:t>
+            </a:r>
+          </a:p>
+          <a:p>
+            <a:pPr marL="0" indent="0">
+              <a:buNone/>
+            </a:pPr>
+            <a:endParaRPr lang="en-US" dirty="0"/>
+          </a:p>
+          <a:p>
+            <a:pPr marL="0" indent="0">
+              <a:buNone/>
+            </a:pPr>
+            <a:r>
+              <a:rPr lang="en-US" dirty="0"/>
+              <a:t>Example: working with NumPy arrays. It is generally faster to use built in NumPy functions than to try to iterate over arrays yourself.</a:t>
+            </a:r>
+          </a:p>
+          <a:p>
+            <a:pPr marL="0" indent="0">
+              <a:buNone/>
+            </a:pPr>
+            <a:endParaRPr lang="en-US" dirty="0"/>
+          </a:p>
+        </p:txBody>
+      </p:sp>
+    </p:spTree>
+    <p:extLst>
+      <p:ext uri="{BB962C8B-B14F-4D97-AF65-F5344CB8AC3E}">
+        <p14:creationId xmlns:p14="http://schemas.microsoft.com/office/powerpoint/2010/main" val="160637075"/>
+      </p:ext>
+    </p:extLst>
+  </p:cSld>
+  <p:clrMapOvr>
+    <a:masterClrMapping/>
+  </p:clrMapOvr>
+</p:sld>
+</file>
+
+<file path=ppt/slides/slide34.xml><?xml version="1.0" encoding="utf-8"?>
+<p:sld xmlns:a="http://schemas.openxmlformats.org/drawingml/2006/main" xmlns:r="http://schemas.openxmlformats.org/officeDocument/2006/relationships" xmlns:p="http://schemas.openxmlformats.org/presentationml/2006/main">
+  <p:cSld>
+    <p:spTree>
+      <p:nvGrpSpPr>
+        <p:cNvPr id="1" name=""/>
+        <p:cNvGrpSpPr/>
+        <p:nvPr/>
+      </p:nvGrpSpPr>
+      <p:grpSpPr>
+        <a:xfrm>
+          <a:off x="0" y="0"/>
+          <a:ext cx="0" cy="0"/>
+          <a:chOff x="0" y="0"/>
+          <a:chExt cx="0" cy="0"/>
+        </a:xfrm>
+      </p:grpSpPr>
+      <p:sp>
+        <p:nvSpPr>
+          <p:cNvPr id="2" name="Title 1">
+            <a:extLst>
+              <a:ext uri="{FF2B5EF4-FFF2-40B4-BE49-F238E27FC236}">
+                <a16:creationId xmlns:a16="http://schemas.microsoft.com/office/drawing/2014/main" id="{D9D4E1C5-CFC6-FC0A-590E-11697D30FF2F}"/>
+              </a:ext>
+            </a:extLst>
+          </p:cNvPr>
+          <p:cNvSpPr>
+            <a:spLocks noGrp="1"/>
+          </p:cNvSpPr>
+          <p:nvPr>
+            <p:ph type="title"/>
+          </p:nvPr>
+        </p:nvSpPr>
+        <p:spPr/>
+        <p:txBody>
+          <a:bodyPr/>
+          <a:lstStyle/>
+          <a:p>
+            <a:r>
+              <a:rPr lang="en-US" dirty="0"/>
+              <a:t>Optimization</a:t>
+            </a:r>
+          </a:p>
+        </p:txBody>
+      </p:sp>
+      <p:pic>
+        <p:nvPicPr>
+          <p:cNvPr id="4" name="Picture 3">
+            <a:extLst>
+              <a:ext uri="{FF2B5EF4-FFF2-40B4-BE49-F238E27FC236}">
+                <a16:creationId xmlns:a16="http://schemas.microsoft.com/office/drawing/2014/main" id="{5382B612-E2AD-E928-AFA2-0621FFDAC9AE}"/>
+              </a:ext>
+            </a:extLst>
+          </p:cNvPr>
+          <p:cNvPicPr>
+            <a:picLocks noChangeAspect="1"/>
+          </p:cNvPicPr>
+          <p:nvPr/>
+        </p:nvPicPr>
+        <p:blipFill>
+          <a:blip r:embed="rId2"/>
+          <a:stretch>
+            <a:fillRect/>
+          </a:stretch>
+        </p:blipFill>
+        <p:spPr>
+          <a:xfrm>
+            <a:off x="1693186" y="2073426"/>
+            <a:ext cx="8805627" cy="4421158"/>
+          </a:xfrm>
+          <a:prstGeom prst="rect">
+            <a:avLst/>
+          </a:prstGeom>
+        </p:spPr>
+      </p:pic>
+    </p:spTree>
+    <p:extLst>
+      <p:ext uri="{BB962C8B-B14F-4D97-AF65-F5344CB8AC3E}">
+        <p14:creationId xmlns:p14="http://schemas.microsoft.com/office/powerpoint/2010/main" val="2638795715"/>
+      </p:ext>
+    </p:extLst>
+  </p:cSld>
+  <p:clrMapOvr>
+    <a:masterClrMapping/>
+  </p:clrMapOvr>
+</p:sld>
+</file>
+
+<file path=ppt/slides/slide35.xml><?xml version="1.0" encoding="utf-8"?>
+<p:sld xmlns:a="http://schemas.openxmlformats.org/drawingml/2006/main" xmlns:r="http://schemas.openxmlformats.org/officeDocument/2006/relationships" xmlns:p="http://schemas.openxmlformats.org/presentationml/2006/main">
+  <p:cSld>
+    <p:spTree>
+      <p:nvGrpSpPr>
+        <p:cNvPr id="1" name=""/>
+        <p:cNvGrpSpPr/>
+        <p:nvPr/>
+      </p:nvGrpSpPr>
+      <p:grpSpPr>
+        <a:xfrm>
+          <a:off x="0" y="0"/>
+          <a:ext cx="0" cy="0"/>
+          <a:chOff x="0" y="0"/>
+          <a:chExt cx="0" cy="0"/>
+        </a:xfrm>
+      </p:grpSpPr>
+      <p:sp>
+        <p:nvSpPr>
+          <p:cNvPr id="2" name="Title 1">
+            <a:extLst>
+              <a:ext uri="{FF2B5EF4-FFF2-40B4-BE49-F238E27FC236}">
+                <a16:creationId xmlns:a16="http://schemas.microsoft.com/office/drawing/2014/main" id="{A0406BEF-E53E-5A11-AA75-B640B092E4D3}"/>
+              </a:ext>
+            </a:extLst>
+          </p:cNvPr>
+          <p:cNvSpPr>
+            <a:spLocks noGrp="1"/>
+          </p:cNvSpPr>
+          <p:nvPr>
+            <p:ph type="title"/>
+          </p:nvPr>
+        </p:nvSpPr>
+        <p:spPr/>
+        <p:txBody>
+          <a:bodyPr/>
+          <a:lstStyle/>
+          <a:p>
+            <a:r>
+              <a:rPr lang="en-US" dirty="0"/>
+              <a:t>Optimization</a:t>
+            </a:r>
+          </a:p>
+        </p:txBody>
+      </p:sp>
+      <p:pic>
+        <p:nvPicPr>
+          <p:cNvPr id="4" name="Content Placeholder 3">
+            <a:extLst>
+              <a:ext uri="{FF2B5EF4-FFF2-40B4-BE49-F238E27FC236}">
+                <a16:creationId xmlns:a16="http://schemas.microsoft.com/office/drawing/2014/main" id="{70F5EFCF-4245-1582-D1E5-721CC4F1D214}"/>
+              </a:ext>
+            </a:extLst>
+          </p:cNvPr>
+          <p:cNvPicPr>
+            <a:picLocks noGrp="1" noChangeAspect="1"/>
+          </p:cNvPicPr>
+          <p:nvPr>
+            <p:ph idx="1"/>
+          </p:nvPr>
+        </p:nvPicPr>
+        <p:blipFill>
+          <a:blip r:embed="rId3"/>
+          <a:stretch>
+            <a:fillRect/>
+          </a:stretch>
+        </p:blipFill>
+        <p:spPr>
+          <a:xfrm>
+            <a:off x="4525084" y="2219570"/>
+            <a:ext cx="6787685" cy="4356802"/>
+          </a:xfrm>
+          <a:prstGeom prst="rect">
+            <a:avLst/>
+          </a:prstGeom>
+        </p:spPr>
+      </p:pic>
+      <p:sp>
+        <p:nvSpPr>
+          <p:cNvPr id="6" name="TextBox 5">
+            <a:extLst>
+              <a:ext uri="{FF2B5EF4-FFF2-40B4-BE49-F238E27FC236}">
+                <a16:creationId xmlns:a16="http://schemas.microsoft.com/office/drawing/2014/main" id="{1461937A-1132-0E3B-F5DF-CB508BAE6B9F}"/>
+              </a:ext>
+            </a:extLst>
+          </p:cNvPr>
+          <p:cNvSpPr txBox="1"/>
+          <p:nvPr/>
+        </p:nvSpPr>
+        <p:spPr>
+          <a:xfrm>
+            <a:off x="293076" y="2497015"/>
+            <a:ext cx="4044461" cy="2677656"/>
+          </a:xfrm>
+          <a:prstGeom prst="rect">
+            <a:avLst/>
+          </a:prstGeom>
+          <a:noFill/>
+        </p:spPr>
+        <p:txBody>
+          <a:bodyPr wrap="square" rtlCol="0">
+            <a:spAutoFit/>
+          </a:bodyPr>
+          <a:lstStyle/>
+          <a:p>
+            <a:r>
+              <a:rPr lang="en-US" sz="2400" dirty="0">
+                <a:latin typeface="Times New Roman" panose="02020603050405020304" pitchFamily="18" charset="0"/>
+                <a:cs typeface="Times New Roman" panose="02020603050405020304" pitchFamily="18" charset="0"/>
+              </a:rPr>
+              <a:t>Why is NumPy summation only faster when the array length gets huge?</a:t>
+            </a:r>
+          </a:p>
+          <a:p>
+            <a:endParaRPr lang="en-US" sz="2400" dirty="0">
+              <a:latin typeface="Times New Roman" panose="02020603050405020304" pitchFamily="18" charset="0"/>
+              <a:cs typeface="Times New Roman" panose="02020603050405020304" pitchFamily="18" charset="0"/>
+            </a:endParaRPr>
+          </a:p>
+          <a:p>
+            <a:r>
+              <a:rPr lang="en-US" sz="2400" dirty="0">
+                <a:latin typeface="Times New Roman" panose="02020603050405020304" pitchFamily="18" charset="0"/>
+                <a:cs typeface="Times New Roman" panose="02020603050405020304" pitchFamily="18" charset="0"/>
+              </a:rPr>
+              <a:t>Hint: has nothing to do with the “size” of the numbers we are adding up.</a:t>
+            </a:r>
+          </a:p>
+        </p:txBody>
+      </p:sp>
+    </p:spTree>
+    <p:extLst>
+      <p:ext uri="{BB962C8B-B14F-4D97-AF65-F5344CB8AC3E}">
+        <p14:creationId xmlns:p14="http://schemas.microsoft.com/office/powerpoint/2010/main" val="1907550636"/>
+      </p:ext>
+    </p:extLst>
+  </p:cSld>
+  <p:clrMapOvr>
+    <a:masterClrMapping/>
+  </p:clrMapOvr>
+</p:sld>
+</file>
+
+<file path=ppt/slides/slide36.xml><?xml version="1.0" encoding="utf-8"?>
+<p:sld xmlns:a="http://schemas.openxmlformats.org/drawingml/2006/main" xmlns:r="http://schemas.openxmlformats.org/officeDocument/2006/relationships" xmlns:p="http://schemas.openxmlformats.org/presentationml/2006/main">
+  <p:cSld>
+    <p:spTree>
+      <p:nvGrpSpPr>
+        <p:cNvPr id="1" name=""/>
+        <p:cNvGrpSpPr/>
+        <p:nvPr/>
+      </p:nvGrpSpPr>
+      <p:grpSpPr>
+        <a:xfrm>
+          <a:off x="0" y="0"/>
+          <a:ext cx="0" cy="0"/>
+          <a:chOff x="0" y="0"/>
+          <a:chExt cx="0" cy="0"/>
+        </a:xfrm>
+      </p:grpSpPr>
+      <p:sp>
+        <p:nvSpPr>
+          <p:cNvPr id="2" name="Title 1">
+            <a:extLst>
+              <a:ext uri="{FF2B5EF4-FFF2-40B4-BE49-F238E27FC236}">
+                <a16:creationId xmlns:a16="http://schemas.microsoft.com/office/drawing/2014/main" id="{B4D69442-5507-6F43-AA74-A3BBA99B5F91}"/>
+              </a:ext>
+            </a:extLst>
+          </p:cNvPr>
+          <p:cNvSpPr>
+            <a:spLocks noGrp="1"/>
+          </p:cNvSpPr>
+          <p:nvPr>
+            <p:ph type="title"/>
+          </p:nvPr>
+        </p:nvSpPr>
+        <p:spPr/>
+        <p:txBody>
+          <a:bodyPr/>
+          <a:lstStyle/>
+          <a:p>
+            <a:r>
+              <a:rPr lang="en-US" dirty="0"/>
+              <a:t>Optimization</a:t>
+            </a:r>
+          </a:p>
+        </p:txBody>
+      </p:sp>
+      <p:sp>
+        <p:nvSpPr>
+          <p:cNvPr id="3" name="Content Placeholder 2">
+            <a:extLst>
+              <a:ext uri="{FF2B5EF4-FFF2-40B4-BE49-F238E27FC236}">
+                <a16:creationId xmlns:a16="http://schemas.microsoft.com/office/drawing/2014/main" id="{21EEF4F3-CD9E-4FCA-DFC0-D63B8D2D3630}"/>
+              </a:ext>
+            </a:extLst>
+          </p:cNvPr>
+          <p:cNvSpPr>
+            <a:spLocks noGrp="1"/>
+          </p:cNvSpPr>
+          <p:nvPr>
+            <p:ph idx="1"/>
+          </p:nvPr>
+        </p:nvSpPr>
+        <p:spPr>
+          <a:xfrm>
+            <a:off x="680321" y="2336872"/>
+            <a:ext cx="9613861" cy="4239773"/>
+          </a:xfrm>
+        </p:spPr>
+        <p:txBody>
+          <a:bodyPr>
+            <a:normAutofit/>
+          </a:bodyPr>
+          <a:lstStyle/>
+          <a:p>
+            <a:pPr marL="0" indent="0">
+              <a:buNone/>
+            </a:pPr>
+            <a:r>
+              <a:rPr lang="en-US" dirty="0"/>
+              <a:t>A: NumPy is calling a function written in C when you run </a:t>
+            </a:r>
+            <a:r>
+              <a:rPr lang="en-US" dirty="0" err="1"/>
+              <a:t>np.sum</a:t>
+            </a:r>
+            <a:r>
+              <a:rPr lang="en-US" dirty="0"/>
+              <a:t>(). That function call has some overhead, which is causing the slow down for the smaller array sizes. However, that overhead is dwarfed in comparison to the gain in speed that C gives you once the array is big.</a:t>
+            </a:r>
+          </a:p>
+          <a:p>
+            <a:pPr marL="0" indent="0">
+              <a:buNone/>
+            </a:pPr>
+            <a:endParaRPr lang="en-US" dirty="0"/>
+          </a:p>
+          <a:p>
+            <a:pPr marL="0" indent="0">
+              <a:buNone/>
+            </a:pPr>
+            <a:endParaRPr lang="en-US" dirty="0"/>
+          </a:p>
+          <a:p>
+            <a:pPr marL="0" indent="0">
+              <a:buNone/>
+            </a:pPr>
+            <a:r>
+              <a:rPr lang="en-US" dirty="0"/>
+              <a:t>LLMs are actually really good at making optimizations like this. You can paste a snippet of your code into Claude and ask something like: ”I am working with x type of data and want to optimize for y workload” and it will tell you what you need to change (or don’t) to get the best performance!</a:t>
+            </a:r>
+          </a:p>
+        </p:txBody>
+      </p:sp>
+    </p:spTree>
+    <p:extLst>
+      <p:ext uri="{BB962C8B-B14F-4D97-AF65-F5344CB8AC3E}">
+        <p14:creationId xmlns:p14="http://schemas.microsoft.com/office/powerpoint/2010/main" val="3339721735"/>
+      </p:ext>
+    </p:extLst>
+  </p:cSld>
+  <p:clrMapOvr>
+    <a:masterClrMapping/>
+  </p:clrMapOvr>
+</p:sld>
+</file>
+
 <file path=ppt/slides/slide4.xml><?xml version="1.0" encoding="utf-8"?>
 <p:sld xmlns:a="http://schemas.openxmlformats.org/drawingml/2006/main" xmlns:r="http://schemas.openxmlformats.org/officeDocument/2006/relationships" xmlns:p="http://schemas.openxmlformats.org/presentationml/2006/main">
   <p:cSld>
@@ -15847,45 +16627,6 @@
             <a:r>
               <a:rPr lang="en-US" dirty="0"/>
               <a:t>Can pass multiple parameters separated by commas, and they’ll print with spaces between them </a:t>
-            </a:r>
-          </a:p>
-          <a:p>
-            <a:pPr marL="0" indent="0">
-              <a:lnSpc>
-                <a:spcPct val="100000"/>
-              </a:lnSpc>
-              <a:spcBef>
-                <a:spcPts val="0"/>
-              </a:spcBef>
-              <a:buNone/>
-            </a:pPr>
-            <a:endParaRPr lang="en-US" dirty="0"/>
-          </a:p>
-          <a:p>
-            <a:pPr marL="0" indent="0">
-              <a:lnSpc>
-                <a:spcPct val="100000"/>
-              </a:lnSpc>
-              <a:spcBef>
-                <a:spcPts val="0"/>
-              </a:spcBef>
-              <a:buNone/>
-            </a:pPr>
-            <a:endParaRPr lang="en-US" dirty="0"/>
-          </a:p>
-          <a:p>
-            <a:pPr marL="0" indent="0">
-              <a:lnSpc>
-                <a:spcPct val="100000"/>
-              </a:lnSpc>
-              <a:spcBef>
-                <a:spcPts val="0"/>
-              </a:spcBef>
-              <a:buNone/>
-            </a:pPr>
-            <a:r>
-              <a:rPr lang="en-US" dirty="0"/>
-              <a:t>Parentheses are required in Python 3, but not Python 2 (which is deprecated so you shouldn’t be using it anyway) </a:t>
             </a:r>
           </a:p>
         </p:txBody>

--- a/day2/slides/review.pptx
+++ b/day2/slides/review.pptx
@@ -232,7 +232,7 @@
           <a:p>
             <a:fld id="{3E00069D-D4B1-DA43-B156-1FB9179E1249}" type="datetimeFigureOut">
               <a:rPr lang="en-US" smtClean="0"/>
-              <a:t>5/10/26</a:t>
+              <a:t>5/12/26</a:t>
             </a:fld>
             <a:endParaRPr lang="en-US"/>
           </a:p>
@@ -3108,7 +3108,7 @@
           <a:p>
             <a:fld id="{51673806-0BCD-1F42-BAA8-2011034B3C6A}" type="datetimeFigureOut">
               <a:rPr lang="en-US" smtClean="0"/>
-              <a:t>5/10/26</a:t>
+              <a:t>5/12/26</a:t>
             </a:fld>
             <a:endParaRPr lang="en-US" dirty="0"/>
           </a:p>
@@ -3521,7 +3521,7 @@
           <a:p>
             <a:fld id="{51673806-0BCD-1F42-BAA8-2011034B3C6A}" type="datetimeFigureOut">
               <a:rPr lang="en-US" smtClean="0"/>
-              <a:t>5/10/26</a:t>
+              <a:t>5/12/26</a:t>
             </a:fld>
             <a:endParaRPr lang="en-US" dirty="0"/>
           </a:p>
@@ -3852,7 +3852,7 @@
           <a:p>
             <a:fld id="{51673806-0BCD-1F42-BAA8-2011034B3C6A}" type="datetimeFigureOut">
               <a:rPr lang="en-US" smtClean="0"/>
-              <a:t>5/10/26</a:t>
+              <a:t>5/12/26</a:t>
             </a:fld>
             <a:endParaRPr lang="en-US" dirty="0"/>
           </a:p>
@@ -4252,7 +4252,7 @@
           <a:p>
             <a:fld id="{51673806-0BCD-1F42-BAA8-2011034B3C6A}" type="datetimeFigureOut">
               <a:rPr lang="en-US" smtClean="0"/>
-              <a:t>5/10/26</a:t>
+              <a:t>5/12/26</a:t>
             </a:fld>
             <a:endParaRPr lang="en-US" dirty="0"/>
           </a:p>
@@ -4815,7 +4815,7 @@
           <a:p>
             <a:fld id="{51673806-0BCD-1F42-BAA8-2011034B3C6A}" type="datetimeFigureOut">
               <a:rPr lang="en-US" smtClean="0"/>
-              <a:t>5/10/26</a:t>
+              <a:t>5/12/26</a:t>
             </a:fld>
             <a:endParaRPr lang="en-US" dirty="0"/>
           </a:p>
@@ -5491,7 +5491,7 @@
           <a:p>
             <a:fld id="{51673806-0BCD-1F42-BAA8-2011034B3C6A}" type="datetimeFigureOut">
               <a:rPr lang="en-US" smtClean="0"/>
-              <a:t>5/10/26</a:t>
+              <a:t>5/12/26</a:t>
             </a:fld>
             <a:endParaRPr lang="en-US" dirty="0"/>
           </a:p>
@@ -6396,7 +6396,7 @@
           <a:p>
             <a:fld id="{51673806-0BCD-1F42-BAA8-2011034B3C6A}" type="datetimeFigureOut">
               <a:rPr lang="en-US" smtClean="0"/>
-              <a:t>5/10/26</a:t>
+              <a:t>5/12/26</a:t>
             </a:fld>
             <a:endParaRPr lang="en-US" dirty="0"/>
           </a:p>
@@ -6704,7 +6704,7 @@
           <a:p>
             <a:fld id="{51673806-0BCD-1F42-BAA8-2011034B3C6A}" type="datetimeFigureOut">
               <a:rPr lang="en-US" smtClean="0"/>
-              <a:t>5/10/26</a:t>
+              <a:t>5/12/26</a:t>
             </a:fld>
             <a:endParaRPr lang="en-US" dirty="0"/>
           </a:p>
@@ -6963,7 +6963,7 @@
           <a:p>
             <a:fld id="{51673806-0BCD-1F42-BAA8-2011034B3C6A}" type="datetimeFigureOut">
               <a:rPr lang="en-US" smtClean="0"/>
-              <a:t>5/10/26</a:t>
+              <a:t>5/12/26</a:t>
             </a:fld>
             <a:endParaRPr lang="en-US" dirty="0"/>
           </a:p>
@@ -7286,7 +7286,7 @@
           <a:p>
             <a:fld id="{51673806-0BCD-1F42-BAA8-2011034B3C6A}" type="datetimeFigureOut">
               <a:rPr lang="en-US" smtClean="0"/>
-              <a:t>5/10/26</a:t>
+              <a:t>5/12/26</a:t>
             </a:fld>
             <a:endParaRPr lang="en-US" dirty="0"/>
           </a:p>
@@ -7670,7 +7670,7 @@
           <a:p>
             <a:fld id="{51673806-0BCD-1F42-BAA8-2011034B3C6A}" type="datetimeFigureOut">
               <a:rPr lang="en-US" smtClean="0"/>
-              <a:t>5/10/26</a:t>
+              <a:t>5/12/26</a:t>
             </a:fld>
             <a:endParaRPr lang="en-US" dirty="0"/>
           </a:p>
@@ -8046,7 +8046,7 @@
           <a:p>
             <a:fld id="{51673806-0BCD-1F42-BAA8-2011034B3C6A}" type="datetimeFigureOut">
               <a:rPr lang="en-US" smtClean="0"/>
-              <a:t>5/10/26</a:t>
+              <a:t>5/12/26</a:t>
             </a:fld>
             <a:endParaRPr lang="en-US" dirty="0"/>
           </a:p>
@@ -8552,7 +8552,7 @@
           <a:p>
             <a:fld id="{51673806-0BCD-1F42-BAA8-2011034B3C6A}" type="datetimeFigureOut">
               <a:rPr lang="en-US" smtClean="0"/>
-              <a:t>5/10/26</a:t>
+              <a:t>5/12/26</a:t>
             </a:fld>
             <a:endParaRPr lang="en-US" dirty="0"/>
           </a:p>
@@ -8809,7 +8809,7 @@
           <a:p>
             <a:fld id="{51673806-0BCD-1F42-BAA8-2011034B3C6A}" type="datetimeFigureOut">
               <a:rPr lang="en-US" smtClean="0"/>
-              <a:t>5/10/26</a:t>
+              <a:t>5/12/26</a:t>
             </a:fld>
             <a:endParaRPr lang="en-US" dirty="0"/>
           </a:p>
@@ -8967,7 +8967,7 @@
           <a:p>
             <a:fld id="{51673806-0BCD-1F42-BAA8-2011034B3C6A}" type="datetimeFigureOut">
               <a:rPr lang="en-US" smtClean="0"/>
-              <a:t>5/10/26</a:t>
+              <a:t>5/12/26</a:t>
             </a:fld>
             <a:endParaRPr lang="en-US" dirty="0"/>
           </a:p>
@@ -9357,7 +9357,7 @@
           <a:p>
             <a:fld id="{51673806-0BCD-1F42-BAA8-2011034B3C6A}" type="datetimeFigureOut">
               <a:rPr lang="en-US" smtClean="0"/>
-              <a:t>5/10/26</a:t>
+              <a:t>5/12/26</a:t>
             </a:fld>
             <a:endParaRPr lang="en-US" dirty="0"/>
           </a:p>
@@ -9765,7 +9765,7 @@
           <a:p>
             <a:fld id="{51673806-0BCD-1F42-BAA8-2011034B3C6A}" type="datetimeFigureOut">
               <a:rPr lang="en-US" smtClean="0"/>
-              <a:t>5/10/26</a:t>
+              <a:t>5/12/26</a:t>
             </a:fld>
             <a:endParaRPr lang="en-US" dirty="0"/>
           </a:p>
@@ -10010,7 +10010,7 @@
             <a:fld id="{51673806-0BCD-1F42-BAA8-2011034B3C6A}" type="datetimeFigureOut">
               <a:rPr lang="en-US" smtClean="0"/>
               <a:pPr/>
-              <a:t>5/10/26</a:t>
+              <a:t>5/12/26</a:t>
             </a:fld>
             <a:endParaRPr lang="en-US" dirty="0"/>
           </a:p>
@@ -10486,7 +10486,7 @@
           <a:p>
             <a:r>
               <a:rPr lang="en-US" dirty="0"/>
-              <a:t>Slides by: James W. Johnson</a:t>
+              <a:t>Slides by: James W. Johnson and Jackson Datkuliak</a:t>
             </a:r>
           </a:p>
         </p:txBody>
@@ -14828,7 +14828,9 @@
           </a:xfrm>
         </p:spPr>
         <p:txBody>
-          <a:bodyPr/>
+          <a:bodyPr>
+            <a:normAutofit fontScale="92500" lnSpcReduction="10000"/>
+          </a:bodyPr>
           <a:lstStyle/>
           <a:p>
             <a:pPr marL="0" marR="0" lvl="0" indent="0" defTabSz="914400" eaLnBrk="1" fontAlgn="auto" latinLnBrk="0" hangingPunct="1">
@@ -14923,7 +14925,7 @@
             </a:pPr>
             <a:r>
               <a:rPr lang="en-US" dirty="0"/>
-              <a:t>Numeric operations </a:t>
+              <a:t>Arithmetic operations </a:t>
             </a:r>
           </a:p>
           <a:p>
@@ -14946,7 +14948,7 @@
             </a:pPr>
             <a:r>
               <a:rPr lang="en-US" dirty="0"/>
-              <a:t>	=, ==, +, -, *, /, //, %, +=, -=, *=, /=, //=, %= </a:t>
+              <a:t>	+, -, *, /, %, **, // </a:t>
             </a:r>
           </a:p>
           <a:p>
@@ -14969,8 +14971,61 @@
             </a:pPr>
             <a:r>
               <a:rPr lang="en-US" dirty="0"/>
-              <a:t>	Recall: x += y is the same as x = x + y </a:t>
-            </a:r>
+              <a:t>	x += y is the same as x = x + y (can add = to other operators)</a:t>
+            </a:r>
+          </a:p>
+          <a:p>
+            <a:pPr marL="0" indent="0">
+              <a:lnSpc>
+                <a:spcPct val="100000"/>
+              </a:lnSpc>
+              <a:spcBef>
+                <a:spcPts val="0"/>
+              </a:spcBef>
+              <a:buNone/>
+              <a:defRPr/>
+            </a:pPr>
+            <a:r>
+              <a:rPr lang="en-US" dirty="0"/>
+              <a:t>	3 / 2 returns 1.5, but 3 // 2 returns 1  (division vs. floor </a:t>
+            </a:r>
+            <a:r>
+              <a:rPr lang="en-US" dirty="0" err="1"/>
+              <a:t>divison</a:t>
+            </a:r>
+            <a:r>
+              <a:rPr lang="en-US" dirty="0"/>
+              <a:t>)</a:t>
+            </a:r>
+          </a:p>
+          <a:p>
+            <a:pPr marL="0" indent="0">
+              <a:lnSpc>
+                <a:spcPct val="100000"/>
+              </a:lnSpc>
+              <a:spcBef>
+                <a:spcPts val="0"/>
+              </a:spcBef>
+              <a:buNone/>
+              <a:defRPr/>
+            </a:pPr>
+            <a:r>
+              <a:rPr lang="en-US" dirty="0"/>
+              <a:t>	5 % 2 returns 1; 5 % 3 returns 2; 5 % 1 returns 0 (modulo)</a:t>
+            </a:r>
+          </a:p>
+          <a:p>
+            <a:pPr marL="0" indent="0">
+              <a:lnSpc>
+                <a:spcPct val="100000"/>
+              </a:lnSpc>
+              <a:spcBef>
+                <a:spcPts val="0"/>
+              </a:spcBef>
+              <a:buNone/>
+              <a:defRPr/>
+            </a:pPr>
+            <a:endParaRPr lang="en-US" dirty="0"/>
           </a:p>
           <a:p>
             <a:pPr marL="0" marR="0" lvl="0" indent="0" defTabSz="914400" eaLnBrk="1" fontAlgn="auto" latinLnBrk="0" hangingPunct="1">
@@ -14990,7 +15045,10 @@
               <a:tabLst/>
               <a:defRPr/>
             </a:pPr>
-            <a:endParaRPr lang="en-US" dirty="0"/>
+            <a:r>
+              <a:rPr lang="en-US" dirty="0"/>
+              <a:t>Comparison operations</a:t>
+            </a:r>
           </a:p>
           <a:p>
             <a:pPr marL="0" marR="0" lvl="0" indent="0" defTabSz="914400" eaLnBrk="1" fontAlgn="auto" latinLnBrk="0" hangingPunct="1">
@@ -15012,21 +15070,7 @@
             </a:pPr>
             <a:r>
               <a:rPr lang="en-US" dirty="0"/>
-              <a:t>/ vs. //: true division vs. floor division (i.e. integer quotient) </a:t>
-            </a:r>
-          </a:p>
-          <a:p>
-            <a:pPr lvl="1">
-              <a:lnSpc>
-                <a:spcPct val="100000"/>
-              </a:lnSpc>
-              <a:spcBef>
-                <a:spcPts val="0"/>
-              </a:spcBef>
-            </a:pPr>
-            <a:r>
-              <a:rPr lang="en-US" dirty="0"/>
-              <a:t>3 / 2 returns 1.5, but 3 // 2 returns 1 </a:t>
+              <a:t>	==, !=, &lt;, &gt;, &lt;=, &gt;=</a:t>
             </a:r>
           </a:p>
           <a:p>
@@ -15050,6 +15094,32 @@
             <a:endParaRPr lang="en-US" dirty="0"/>
           </a:p>
           <a:p>
+            <a:pPr marL="0" lvl="0" indent="0">
+              <a:lnSpc>
+                <a:spcPct val="100000"/>
+              </a:lnSpc>
+              <a:spcBef>
+                <a:spcPts val="0"/>
+              </a:spcBef>
+              <a:buNone/>
+              <a:defRPr/>
+            </a:pPr>
+            <a:r>
+              <a:rPr lang="en-US" dirty="0"/>
+              <a:t>Look at the pages under Python Operators: </a:t>
+            </a:r>
+            <a:r>
+              <a:rPr lang="en-US" dirty="0">
+                <a:hlinkClick r:id="rId3"/>
+              </a:rPr>
+              <a:t>https://www.w3schools.com/python/python_operators.asp</a:t>
+            </a:r>
+            <a:r>
+              <a:rPr lang="en-US" dirty="0"/>
+              <a:t> </a:t>
+            </a:r>
+          </a:p>
+          <a:p>
             <a:pPr marL="0" marR="0" lvl="0" indent="0" defTabSz="914400" eaLnBrk="1" fontAlgn="auto" latinLnBrk="0" hangingPunct="1">
               <a:lnSpc>
                 <a:spcPct val="100000"/>
@@ -15067,24 +15137,7 @@
               <a:tabLst/>
               <a:defRPr/>
             </a:pPr>
-            <a:r>
-              <a:rPr lang="en-US" dirty="0"/>
-              <a:t>%: modulo (calculates remainder)  </a:t>
-            </a:r>
-          </a:p>
-          <a:p>
-            <a:pPr lvl="1">
-              <a:lnSpc>
-                <a:spcPct val="100000"/>
-              </a:lnSpc>
-              <a:spcBef>
-                <a:spcPts val="0"/>
-              </a:spcBef>
-            </a:pPr>
-            <a:r>
-              <a:rPr lang="en-US" dirty="0"/>
-              <a:t>5 % 2 returns 1; 5 % 3 returns 2; 5 % 1 returns 0 </a:t>
-            </a:r>
+            <a:endParaRPr lang="en-US" dirty="0"/>
           </a:p>
         </p:txBody>
       </p:sp>
@@ -16127,7 +16180,7 @@
             </a:r>
             <a:r>
               <a:rPr lang="en-US" dirty="0"/>
-              <a:t>(). That function call has some overhead, which is causing the slow down for the smaller array sizes. However, that overhead is dwarfed in comparison to the gain in speed that C gives you once the array is big.</a:t>
+              <a:t>(). That function call has some overhead, which is causing the slow down for the smaller array sizes. However, that overhead is dwarfed by the gain in speed that C gives you once the array is big.</a:t>
             </a:r>
           </a:p>
           <a:p>
@@ -16148,7 +16201,7 @@
             </a:pPr>
             <a:r>
               <a:rPr lang="en-US" dirty="0"/>
-              <a:t>LLMs are actually really good at making optimizations like this. You can paste a snippet of your code into Claude and ask something like: ”I am working with x type of data and want to optimize for y workload” and it will tell you what you need to change (or don’t) to get the best performance!</a:t>
+              <a:t>LLMs are really good at making optimizations like this. You can paste a snippet of your code into Claude and ask something like: ”I am working with x type of data and want to optimize for y workload” and it will tell you what you need to change (or don’t) to get the best performance!</a:t>
             </a:r>
           </a:p>
         </p:txBody>
